--- a/tests/output/metropolitan.pptx
+++ b/tests/output/metropolitan.pptx
@@ -4653,7 +4653,9 @@
         </p:nvSpPr>
         <p:spPr/>
         <p:txBody>
-          <a:bodyPr/>
+          <a:bodyPr>
+            <a:normAutofit/>
+          </a:bodyPr>
           <a:lstStyle/>
           <a:p>
             <a:pPr lvl="0"/>
@@ -5983,7 +5985,9 @@
         </p:nvSpPr>
         <p:spPr/>
         <p:txBody>
-          <a:bodyPr/>
+          <a:bodyPr>
+            <a:normAutofit/>
+          </a:bodyPr>
           <a:lstStyle/>
           <a:p>
             <a:pPr lvl="0"/>

--- a/tests/output/metropolitan.pptx
+++ b/tests/output/metropolitan.pptx
@@ -4653,7 +4653,7 @@
         </p:nvSpPr>
         <p:spPr/>
         <p:txBody>
-          <a:bodyPr>
+          <a:bodyPr anchor="ctr">
             <a:normAutofit/>
           </a:bodyPr>
           <a:lstStyle/>
@@ -5985,7 +5985,7 @@
         </p:nvSpPr>
         <p:spPr/>
         <p:txBody>
-          <a:bodyPr>
+          <a:bodyPr anchor="ctr">
             <a:normAutofit/>
           </a:bodyPr>
           <a:lstStyle/>
@@ -6644,7 +6644,7 @@
         </p:nvSpPr>
         <p:spPr/>
         <p:txBody>
-          <a:bodyPr>
+          <a:bodyPr anchor="ctr">
             <a:normAutofit/>
           </a:bodyPr>
           <a:lstStyle/>
